--- a/DBTUNING/ch19_성능측정기준_DBTime/ch19_성능측정의기준_DBTime.pptx
+++ b/DBTUNING/ch19_성능측정기준_DBTime/ch19_성능측정의기준_DBTime.pptx
@@ -606,7 +606,7 @@
           <a:lstStyle/>
           <a:p>
             <a:r>
-              <a:t>DB CPU 델타가 DB time 델타보다 큰 것은 버그도 오차도 아닙니다. 구간이 0.3초로 너무 짧아 두 카운터가 갱신되는 시점이 미세하게 어긋나고 마이크로초 반올림이 겹치면서 분해가 불안정해진 것입니다. 그렇다고 대기가 없었던 것은 아닙니다. 대기의 실체는 V$SESSION_EVENT에서 확인해야 하며, 정확한 CPU 대기 비율을 보려면 순간이 아니라 수 분짜리 AWR 구간으로 봐야 합니다. 여기서 다시 6장으로 이어집니다.</a:t>
+              <a:t>DB CPU 델타가 DB time 델타보다 큰 것은 버그도 오차도 아닙니다. 구간이 0.3초로 너무 짧아 두 카운터가 갱신되는 시점이 미세하게 어긋나고 마이크로초 반올림이 겹치면서 분해가 불안정해진 것입니다. 그렇다고 대기가 없었던 것은 아닙니다. 대기의 실체는 V$SESSION_EVENT에서 확인해야 하며, 정확한 CPU 대기 비율을 보려면 순간이 아니라 수 분짜리 AWR 구간으로 봐야 합니다. 여기서 다시 ch20으로 이어집니다.</a:t>
             </a:r>
           </a:p>
         </p:txBody>
@@ -956,7 +956,7 @@
           <a:lstStyle/>
           <a:p>
             <a:r>
-              <a:t>시간 모델과 대기 클래스 외에도 시스템과 세션 수준의 방대한 누적 카운터가 V$SYSSTAT와 V$SESSTAT에 있습니다. 논리 읽기, 물리 읽기, 리두 크기, 파싱 수, 커밋 수, 정렬 같은 값들입니다. 이 카운터들은 대기와 짝을 이뤄, 대기 하나만 보지 않고 함께 교차 검증합니다. 이들도 누적값이라 델타로 봅니다. 한편 활성 세션을 1초 주기로 샘플링하는 ASH는 순간을 붙잡는 또 하나의 축이지만 Diagnostics Pack이 필요해, 이 장에서는 개념만 소개하고 10장에서 다룹니다.</a:t>
+              <a:t>시간 모델과 대기 클래스 외에도 시스템과 세션 수준의 방대한 누적 카운터가 V$SYSSTAT와 V$SESSTAT에 있습니다. 논리 읽기, 물리 읽기, 리두 크기, 파싱 수, 커밋 수, 정렬 같은 값들입니다. 이 카운터들은 대기와 짝을 이뤄, 대기 하나만 보지 않고 함께 교차 검증합니다. 이들도 누적값이라 델타로 봅니다. 한편 활성 세션을 1초 주기로 샘플링하는 ASH는 순간을 붙잡는 또 하나의 축이지만 Diagnostics Pack이 필요해, 이 장에서는 개념만 소개하고 ch25에서 다룹니다.</a:t>
             </a:r>
           </a:p>
         </p:txBody>
@@ -1026,7 +1026,7 @@
           <a:lstStyle/>
           <a:p>
             <a:r>
-              <a:t>버퍼 캐시 히트율 같은 계산된 비율은 문제 존재를 확정하는 판정자로 쓰면 안 되고 지표로만 씁니다. 비효율 SQL이 같은 블록을 반복해서 논리 읽기로 되읽으면 그 대부분이 캐시에서 처리되어 히트율은 오히려 99퍼센트로 올라갑니다. 즉 히트율이 높아진 것이 성능이 나빠진 결과일 수 있습니다. 진짜로 봐야 할 것은 논리 읽기 자체가 왜 이렇게 많은가입니다. 즉 히트율이 높아진 것이 오히려 성능이 나빠진 결과일 수 있어, 단일 비율 하나로 건강을 판정하면 정반대의 현실을 놓칩니다. 이 함정은 17장에서 직접 재현합니다.</a:t>
+              <a:t>버퍼 캐시 히트율 같은 계산된 비율은 문제 존재를 확정하는 판정자로 쓰면 안 되고 지표로만 씁니다. 비효율 SQL이 같은 블록을 반복해서 논리 읽기로 되읽으면 그 대부분이 캐시에서 처리되어 히트율은 오히려 99퍼센트로 올라갑니다. 즉 히트율이 높아진 것이 성능이 나빠진 결과일 수 있습니다. 진짜로 봐야 할 것은 논리 읽기 자체가 왜 이렇게 많은가입니다. 즉 히트율이 높아진 것이 오히려 성능이 나빠진 결과일 수 있어, 단일 비율 하나로 건강을 판정하면 정반대의 현실을 놓칩니다. 이 함정은 ch31에서 직접 재현합니다.</a:t>
             </a:r>
           </a:p>
         </p:txBody>
@@ -1516,7 +1516,7 @@
           <a:lstStyle/>
           <a:p>
             <a:r>
-              <a:t>델타를 초당과 트랜잭션당으로 환산하는 이유는 구간 길이가 다른 측정을 비교하려면 시간으로 정규화해야 하기 때문입니다. 특히 트랜잭션당 값은 부하가 늘어난 것인지 트랜잭션 하나가 무거워진 것인지를 가려 줍니다. 느려진 것과 일이 늘어난 것은 다르다는 11장의 핵심이 여기서 씨앗을 얻습니다. 또 물리 읽기 델타가 크면 User I/O 대기 델타도 커야 앞뒤가 맞으므로, 조각들을 함께 보며 교차 검증합니다.</a:t>
+              <a:t>델타를 초당과 트랜잭션당으로 환산하는 이유는 구간 길이가 다른 측정을 비교하려면 시간으로 정규화해야 하기 때문입니다. 특히 트랜잭션당 값은 부하가 늘어난 것인지 트랜잭션 하나가 무거워진 것인지를 가려 줍니다. 느려진 것과 일이 늘어난 것은 다르다는 ch23의 핵심이 여기서 씨앗을 얻습니다. 또 물리 읽기 델타가 크면 User I/O 대기 델타도 커야 앞뒤가 맞으므로, 조각들을 함께 보며 교차 검증합니다.</a:t>
             </a:r>
           </a:p>
         </p:txBody>
@@ -1656,7 +1656,7 @@
           <a:lstStyle/>
           <a:p>
             <a:r>
-              <a:t>델타를 재는 방법은 단순합니다. 구간 시작과 끝에 누적값을 캡처해 빼면 됩니다. AWR 보고서가 하는 일이 바로 두 스냅샷 사이의 델타 계산입니다. 그런데 구간을 너무 짧게 잡으면 시간 모델의 CPU와 대기 분해가 샘플링과 반올림 노이즈에 휘둘려 불안정해집니다. 그래서 정확한 DB Time 분해는 순간이 아니라 수 분짜리 구간으로 봐야 하며, 그 구간을 체계적으로 뜨는 도구가 6장의 AWR입니다. 라이선스가 없어 AWR을 못 써도 원리는 같아서, V$ 뷰를 스크립트로 두 번 조회해 빼기만 하면 같은 델타를 얻습니다.</a:t>
+              <a:t>델타를 재는 방법은 단순합니다. 구간 시작과 끝에 누적값을 캡처해 빼면 됩니다. AWR 보고서가 하는 일이 바로 두 스냅샷 사이의 델타 계산입니다. 그런데 구간을 너무 짧게 잡으면 시간 모델의 CPU와 대기 분해가 샘플링과 반올림 노이즈에 휘둘려 불안정해집니다. 그래서 정확한 DB Time 분해는 순간이 아니라 수 분짜리 구간으로 봐야 하며, 그 구간을 체계적으로 뜨는 도구가 ch20의 AWR입니다. 라이선스가 없어 AWR을 못 써도 원리는 같아서, V$ 뷰를 스크립트로 두 번 조회해 빼기만 하면 같은 델타를 얻습니다.</a:t>
             </a:r>
           </a:p>
         </p:txBody>
@@ -5305,7 +5305,7 @@
                 <a:ea typeface="맑은 고딕"/>
                 <a:cs typeface="맑은 고딕"/>
               </a:rPr>
-              <a:t>제5장</a:t>
+              <a:t>제ch19</a:t>
             </a:r>
           </a:p>
         </p:txBody>
@@ -7028,7 +7028,7 @@
                 <a:ea typeface="맑은 고딕"/>
                 <a:cs typeface="맑은 고딕"/>
               </a:rPr>
-              <a:t>•  정확한 비율은 수 분 구간(AWR)으로 → 6장</a:t>
+              <a:t>•  정확한 비율은 수 분 구간(AWR)으로 → ch20</a:t>
             </a:r>
           </a:p>
         </p:txBody>
@@ -8013,7 +8013,7 @@
                 <a:ea typeface="맑은 고딕"/>
                 <a:cs typeface="맑은 고딕"/>
               </a:rPr>
-              <a:t>•  STATISTICS_LEVEL 세 수준을 알고 이 장(무료)과 6장 AWR(🔒 Diagnostics Pack)의 경계를 구분한다.</a:t>
+              <a:t>•  STATISTICS_LEVEL 세 수준을 알고 이 장(무료)과 ch20 AWR(🔒 Diagnostics Pack)의 경계를 구분한다.</a:t>
             </a:r>
           </a:p>
         </p:txBody>
@@ -8976,7 +8976,7 @@
                 <a:ea typeface="맑은 고딕"/>
                 <a:cs typeface="맑은 고딕"/>
               </a:rPr>
-              <a:t>•  ASH: 활성 세션 1초 샘플링 = 🔒 Diagnostics Pack(개념만, 10장)</a:t>
+              <a:t>•  ASH: 활성 세션 1초 샘플링 = 🔒 Diagnostics Pack(개념만, ch25)</a:t>
             </a:r>
           </a:p>
         </p:txBody>
@@ -9446,7 +9446,7 @@
                 <a:ea typeface="맑은 고딕"/>
                 <a:cs typeface="맑은 고딕"/>
               </a:rPr>
-              <a:t>•  히트율 99%인데 응답시간이 나쁠 수 있다(17장 재현)</a:t>
+              <a:t>•  히트율 99%인데 응답시간이 나쁠 수 있다(ch31 재현)</a:t>
             </a:r>
           </a:p>
           <a:p>
@@ -11720,7 +11720,7 @@
                 <a:ea typeface="맑은 고딕"/>
                 <a:cs typeface="맑은 고딕"/>
               </a:rPr>
-              <a:t>•  트랜잭션당 값이 부하 증가 vs 트랜잭션 무거워짐을 구분(→11장)</a:t>
+              <a:t>•  트랜잭션당 값이 부하 증가 vs 트랜잭션 무거워짐을 구분(→ch23)</a:t>
             </a:r>
           </a:p>
           <a:p>
@@ -11986,7 +11986,7 @@
                 <a:ea typeface="맑은 고딕"/>
                 <a:cs typeface="맑은 고딕"/>
               </a:rPr>
-              <a:t>•  Q6. STATISTICS_LEVEL 세 값과, 이 장과 6장 AWR의 라이선스 경계를 구분하라.</a:t>
+              <a:t>•  Q6. STATISTICS_LEVEL 세 값과, 이 장과 ch20 AWR의 라이선스 경계를 구분하라.</a:t>
             </a:r>
           </a:p>
         </p:txBody>
@@ -12162,7 +12162,7 @@
                 <a:ea typeface="맑은 고딕"/>
                 <a:cs typeface="맑은 고딕"/>
               </a:rPr>
-              <a:t>•  짧은 구간(0.3초)은 시간 모델 분해가 불안정(CPU 107.8%). 수 분 AWR 구간 필요(→6장).</a:t>
+              <a:t>•  짧은 구간(0.3초)은 시간 모델 분해가 불안정(CPU 107.8%). 수 분 AWR 구간 필요(→ch20).</a:t>
             </a:r>
           </a:p>
           <a:p>
@@ -12757,7 +12757,7 @@
                 <a:ea typeface="맑은 고딕"/>
                 <a:cs typeface="맑은 고딕"/>
               </a:rPr>
-              <a:t>•  짧은 구간의 함정 → 6장</a:t>
+              <a:t>•  짧은 구간의 함정 → ch20</a:t>
             </a:r>
           </a:p>
         </p:txBody>
@@ -13825,7 +13825,7 @@
                 <a:ea typeface="맑은 고딕"/>
                 <a:cs typeface="맑은 고딕"/>
               </a:rPr>
-              <a:t>•  정확한 분해는 순간이 아니라 수 분 구간으로 → 6장 AWR</a:t>
+              <a:t>•  정확한 분해는 순간이 아니라 수 분 구간으로 → ch20 AWR</a:t>
             </a:r>
           </a:p>
         </p:txBody>

--- a/DBTUNING/ch19_성능측정기준_DBTime/ch19_성능측정의기준_DBTime.pptx
+++ b/DBTUNING/ch19_성능측정기준_DBTime/ch19_성능측정의기준_DBTime.pptx
@@ -5305,7 +5305,7 @@
                 <a:ea typeface="맑은 고딕"/>
                 <a:cs typeface="맑은 고딕"/>
               </a:rPr>
-              <a:t>제ch19</a:t>
+              <a:t>ch19</a:t>
             </a:r>
           </a:p>
         </p:txBody>

--- a/DBTUNING/ch19_성능측정기준_DBTime/ch19_성능측정의기준_DBTime.pptx
+++ b/DBTUNING/ch19_성능측정기준_DBTime/ch19_성능측정의기준_DBTime.pptx
@@ -5404,7 +5404,7 @@
                 <a:ea typeface="맑은 고딕"/>
                 <a:cs typeface="맑은 고딕"/>
               </a:rPr>
-              <a:t>5.3</a:t>
+              <a:t>19.3</a:t>
             </a:r>
           </a:p>
         </p:txBody>
@@ -6354,7 +6354,7 @@
                 <a:ea typeface="맑은 고딕"/>
                 <a:cs typeface="맑은 고딕"/>
               </a:rPr>
-              <a:t>5.4</a:t>
+              <a:t>19.4</a:t>
             </a:r>
           </a:p>
         </p:txBody>
@@ -7358,7 +7358,7 @@
                 <a:ea typeface="맑은 고딕"/>
                 <a:cs typeface="맑은 고딕"/>
               </a:rPr>
-              <a:t>5.5</a:t>
+              <a:t>19.5</a:t>
             </a:r>
           </a:p>
         </p:txBody>
@@ -9075,7 +9075,7 @@
                 <a:ea typeface="맑은 고딕"/>
                 <a:cs typeface="맑은 고딕"/>
               </a:rPr>
-              <a:t>5.6</a:t>
+              <a:t>19.6</a:t>
             </a:r>
           </a:p>
         </p:txBody>
@@ -10025,7 +10025,7 @@
                 <a:ea typeface="맑은 고딕"/>
                 <a:cs typeface="맑은 고딕"/>
               </a:rPr>
-              <a:t>5.7</a:t>
+              <a:t>19.7</a:t>
             </a:r>
           </a:p>
         </p:txBody>
@@ -10911,7 +10911,7 @@
                 <a:ea typeface="맑은 고딕"/>
                 <a:cs typeface="맑은 고딕"/>
               </a:rPr>
-              <a:t>•  5.2  데이터베이스 통계와 델타 — 누적값을 그대로 읽지 않는다</a:t>
+              <a:t>•  19.2  데이터베이스 통계와 델타 — 누적값을 그대로 읽지 않는다</a:t>
             </a:r>
           </a:p>
           <a:p>
@@ -10929,7 +10929,7 @@
                 <a:ea typeface="맑은 고딕"/>
                 <a:cs typeface="맑은 고딕"/>
               </a:rPr>
-              <a:t>•  5.3  DB Time — 이 과정의 공통 화폐</a:t>
+              <a:t>•  19.3  DB Time — 이 과정의 공통 화폐</a:t>
             </a:r>
           </a:p>
           <a:p>
@@ -10947,7 +10947,7 @@
                 <a:ea typeface="맑은 고딕"/>
                 <a:cs typeface="맑은 고딕"/>
               </a:rPr>
-              <a:t>•  5.4  시간 모델 — V$SYS_TIME_MODEL과 V$SESS_TIME_MODEL</a:t>
+              <a:t>•  19.4  시간 모델 — V$SYS_TIME_MODEL과 V$SESS_TIME_MODEL</a:t>
             </a:r>
           </a:p>
           <a:p>
@@ -10965,7 +10965,7 @@
                 <a:ea typeface="맑은 고딕"/>
                 <a:cs typeface="맑은 고딕"/>
               </a:rPr>
-              <a:t>•  5.5  대기와 대기 클래스 — V$SYSTEM_WAIT_CLASS</a:t>
+              <a:t>•  19.5  대기와 대기 클래스 — V$SYSTEM_WAIT_CLASS</a:t>
             </a:r>
           </a:p>
           <a:p>
@@ -10983,7 +10983,7 @@
                 <a:ea typeface="맑은 고딕"/>
                 <a:cs typeface="맑은 고딕"/>
               </a:rPr>
-              <a:t>•  5.6  통계 해석의 원칙 — 숫자를 오독하지 않는 법</a:t>
+              <a:t>•  19.6  통계 해석의 원칙 — 숫자를 오독하지 않는 법</a:t>
             </a:r>
           </a:p>
           <a:p>
@@ -11001,7 +11001,7 @@
                 <a:ea typeface="맑은 고딕"/>
                 <a:cs typeface="맑은 고딕"/>
               </a:rPr>
-              <a:t>•  5.7  STATISTICS_LEVEL — 측정을 켜고 끄는 스위치</a:t>
+              <a:t>•  19.7  STATISTICS_LEVEL — 측정을 켜고 끄는 스위치</a:t>
             </a:r>
           </a:p>
           <a:p>
@@ -11019,7 +11019,7 @@
                 <a:ea typeface="맑은 고딕"/>
                 <a:cs typeface="맑은 고딕"/>
               </a:rPr>
-              <a:t>•  5.8  부하 전후로 DB Time을 재는 절차</a:t>
+              <a:t>•  19.8  부하 전후로 DB Time을 재는 절차</a:t>
             </a:r>
           </a:p>
           <a:p>
@@ -11136,7 +11136,7 @@
                 <a:ea typeface="맑은 고딕"/>
                 <a:cs typeface="맑은 고딕"/>
               </a:rPr>
-              <a:t>5.8</a:t>
+              <a:t>19.8</a:t>
             </a:r>
           </a:p>
         </p:txBody>
@@ -12599,7 +12599,7 @@
                 <a:ea typeface="맑은 고딕"/>
                 <a:cs typeface="맑은 고딕"/>
               </a:rPr>
-              <a:t>5.2</a:t>
+              <a:t>19.2</a:t>
             </a:r>
           </a:p>
         </p:txBody>
